--- a/UATX/AIUpdate26Enh.pptx
+++ b/UATX/AIUpdate26Enh.pptx
@@ -185,7 +185,7 @@
                 <a:uFillTx/>
                 <a:latin typeface="Times New Roman"/>
               </a:rPr>
-              <a:t>&lt;header&gt;</a:t>
+              <a:t> </a:t>
             </a:r>
             <a:endParaRPr lang="en-US" sz="1400" b="0" u="none" strike="noStrike">
               <a:solidFill>
@@ -251,7 +251,7 @@
                 <a:uFillTx/>
                 <a:latin typeface="Times New Roman"/>
               </a:rPr>
-              <a:t>&lt;date/time&gt;</a:t>
+              <a:t> </a:t>
             </a:r>
             <a:endParaRPr lang="en-US" sz="1400" b="0" u="none" strike="noStrike">
               <a:solidFill>
@@ -317,7 +317,7 @@
                 <a:uFillTx/>
                 <a:latin typeface="Times New Roman"/>
               </a:rPr>
-              <a:t>&lt;footer&gt;</a:t>
+              <a:t> </a:t>
             </a:r>
             <a:endParaRPr lang="en-US" sz="1400" b="0" u="none" strike="noStrike">
               <a:solidFill>
@@ -374,7 +374,7 @@
             <a:pPr indent="0" algn="r">
               <a:buNone/>
             </a:pPr>
-            <a:fld id="{8F2B9D5D-60A8-4228-8492-52E96C925F9A}" type="slidenum">
+            <a:fld id="{35190270-A225-4365-B809-C99F6E3C6899}" type="slidenum">
               <a:rPr lang="en-US" sz="1400" b="0" u="none" strike="noStrike">
                 <a:solidFill>
                   <a:srgbClr val="000000"/>
@@ -383,7 +383,7 @@
                 <a:uFillTx/>
                 <a:latin typeface="Times New Roman"/>
               </a:rPr>
-              <a:t>&lt;number&gt;</a:t>
+              <a:t>9</a:t>
             </a:fld>
             <a:endParaRPr lang="en-US" sz="1400" b="0" u="none" strike="noStrike">
               <a:solidFill>
@@ -535,7 +535,7 @@
               </a:lnSpc>
               <a:buNone/>
             </a:pPr>
-            <a:fld id="{E4D5075A-C3C6-4FE5-8B37-F068815E1F95}" type="slidenum">
+            <a:fld id="{7464598E-714C-47D1-AC63-6CC54BC3549C}" type="slidenum">
               <a:rPr lang="en-US" sz="1200" b="0" u="none" strike="noStrike">
                 <a:solidFill>
                   <a:schemeClr val="dk1"/>
@@ -545,7 +545,7 @@
                 <a:latin typeface="+mn-lt"/>
                 <a:ea typeface="+mn-ea"/>
               </a:rPr>
-              <a:t>&lt;number&gt;</a:t>
+              <a:t>9</a:t>
             </a:fld>
             <a:endParaRPr lang="en-US" sz="1200" b="0" u="none" strike="noStrike">
               <a:solidFill>
@@ -696,7 +696,7 @@
               </a:lnSpc>
               <a:buNone/>
             </a:pPr>
-            <a:fld id="{04781AB4-CE67-46C6-866F-AB4DB2418DEC}" type="slidenum">
+            <a:fld id="{8641387E-332E-4514-BD43-4D79BA5317F2}" type="slidenum">
               <a:rPr lang="en-US" sz="1200" b="0" u="none" strike="noStrike">
                 <a:solidFill>
                   <a:schemeClr val="dk1"/>
@@ -857,7 +857,7 @@
               </a:lnSpc>
               <a:buNone/>
             </a:pPr>
-            <a:fld id="{BCE24E28-A988-41F7-9B52-AE7E629110D7}" type="slidenum">
+            <a:fld id="{10D7DFE7-64BB-4C6B-89A8-23B8A7A287ED}" type="slidenum">
               <a:rPr lang="en-US" sz="1200" b="0" u="none" strike="noStrike">
                 <a:solidFill>
                   <a:schemeClr val="dk1"/>
@@ -1018,7 +1018,7 @@
               </a:lnSpc>
               <a:buNone/>
             </a:pPr>
-            <a:fld id="{0EFD3BF4-8375-4AC5-B6F7-37C35398C839}" type="slidenum">
+            <a:fld id="{10A89E50-C55B-4F56-8FD7-987AC5863D94}" type="slidenum">
               <a:rPr lang="en-US" sz="1200" b="0" u="none" strike="noStrike">
                 <a:solidFill>
                   <a:schemeClr val="dk1"/>
@@ -1028,7 +1028,7 @@
                 <a:latin typeface="+mn-lt"/>
                 <a:ea typeface="+mn-ea"/>
               </a:rPr>
-              <a:t>&lt;number&gt;</a:t>
+              <a:t>9</a:t>
             </a:fld>
             <a:endParaRPr lang="en-US" sz="1200" b="0" u="none" strike="noStrike">
               <a:solidFill>
@@ -1179,7 +1179,7 @@
               </a:lnSpc>
               <a:buNone/>
             </a:pPr>
-            <a:fld id="{835BB884-2123-4F8A-B7F3-F16A930A6B4E}" type="slidenum">
+            <a:fld id="{8556D129-C561-4178-8738-8FD09071B858}" type="slidenum">
               <a:rPr lang="en-US" sz="1200" b="0" u="none" strike="noStrike">
                 <a:solidFill>
                   <a:schemeClr val="dk1"/>
@@ -1189,7 +1189,7 @@
                 <a:latin typeface="+mn-lt"/>
                 <a:ea typeface="+mn-ea"/>
               </a:rPr>
-              <a:t>&lt;number&gt;</a:t>
+              <a:t>9</a:t>
             </a:fld>
             <a:endParaRPr lang="en-US" sz="1200" b="0" u="none" strike="noStrike">
               <a:solidFill>
@@ -1340,7 +1340,7 @@
               </a:lnSpc>
               <a:buNone/>
             </a:pPr>
-            <a:fld id="{E09C9B49-1BF9-4419-9CB8-41ED64B3AC6E}" type="slidenum">
+            <a:fld id="{4C4F08EC-E1A8-40AF-911A-43A729E868B8}" type="slidenum">
               <a:rPr lang="en-US" sz="1200" b="0" u="none" strike="noStrike">
                 <a:solidFill>
                   <a:schemeClr val="dk1"/>
@@ -1350,7 +1350,7 @@
                 <a:latin typeface="+mn-lt"/>
                 <a:ea typeface="+mn-ea"/>
               </a:rPr>
-              <a:t>&lt;number&gt;</a:t>
+              <a:t>9</a:t>
             </a:fld>
             <a:endParaRPr lang="en-US" sz="1200" b="0" u="none" strike="noStrike">
               <a:solidFill>
@@ -1501,7 +1501,7 @@
               </a:lnSpc>
               <a:buNone/>
             </a:pPr>
-            <a:fld id="{44239422-99DE-439F-9C92-9D7371812301}" type="slidenum">
+            <a:fld id="{727960C2-140E-4A59-BB8A-AA533DD06785}" type="slidenum">
               <a:rPr lang="en-US" sz="1200" b="0" u="none" strike="noStrike">
                 <a:solidFill>
                   <a:schemeClr val="dk1"/>
@@ -1511,7 +1511,7 @@
                 <a:latin typeface="+mn-lt"/>
                 <a:ea typeface="+mn-ea"/>
               </a:rPr>
-              <a:t>&lt;number&gt;</a:t>
+              <a:t>9</a:t>
             </a:fld>
             <a:endParaRPr lang="en-US" sz="1200" b="0" u="none" strike="noStrike">
               <a:solidFill>
@@ -1662,7 +1662,7 @@
               </a:lnSpc>
               <a:buNone/>
             </a:pPr>
-            <a:fld id="{A981F391-C38B-4D72-BE57-A370F9AAE96F}" type="slidenum">
+            <a:fld id="{55257092-59F3-43AA-9F01-BD4456776054}" type="slidenum">
               <a:rPr lang="en-US" sz="1200" b="0" u="none" strike="noStrike">
                 <a:solidFill>
                   <a:schemeClr val="dk1"/>
@@ -1672,7 +1672,7 @@
                 <a:latin typeface="+mn-lt"/>
                 <a:ea typeface="+mn-ea"/>
               </a:rPr>
-              <a:t>&lt;number&gt;</a:t>
+              <a:t>9</a:t>
             </a:fld>
             <a:endParaRPr lang="en-US" sz="1200" b="0" u="none" strike="noStrike">
               <a:solidFill>
@@ -1823,7 +1823,7 @@
               </a:lnSpc>
               <a:buNone/>
             </a:pPr>
-            <a:fld id="{D82764A6-BA50-454D-9BFC-460011DDF8FC}" type="slidenum">
+            <a:fld id="{C6D707F3-0FFE-4B84-A670-3885CDCDA139}" type="slidenum">
               <a:rPr lang="en-US" sz="1200" b="0" u="none" strike="noStrike">
                 <a:solidFill>
                   <a:schemeClr val="dk1"/>
@@ -1833,7 +1833,7 @@
                 <a:latin typeface="+mn-lt"/>
                 <a:ea typeface="+mn-ea"/>
               </a:rPr>
-              <a:t>&lt;number&gt;</a:t>
+              <a:t>9</a:t>
             </a:fld>
             <a:endParaRPr lang="en-US" sz="1200" b="0" u="none" strike="noStrike">
               <a:solidFill>
@@ -1984,7 +1984,7 @@
               </a:lnSpc>
               <a:buNone/>
             </a:pPr>
-            <a:fld id="{913A3BC1-7E87-485D-98F7-467BFEE02BCA}" type="slidenum">
+            <a:fld id="{110B3F50-5C11-45C1-B245-AB8DA56574AE}" type="slidenum">
               <a:rPr lang="en-US" sz="1200" b="0" u="none" strike="noStrike">
                 <a:solidFill>
                   <a:schemeClr val="dk1"/>
@@ -2145,7 +2145,7 @@
               </a:lnSpc>
               <a:buNone/>
             </a:pPr>
-            <a:fld id="{AE2AC87A-AC8C-4CCB-843F-50721489B969}" type="slidenum">
+            <a:fld id="{42D867FB-4904-46A4-878D-C4664FA2BD62}" type="slidenum">
               <a:rPr lang="en-US" sz="1200" b="0" u="none" strike="noStrike">
                 <a:solidFill>
                   <a:schemeClr val="dk1"/>
@@ -2919,7 +2919,7 @@
               </a:lnSpc>
               <a:buNone/>
             </a:pPr>
-            <a:fld id="{8DEA8B59-0224-4C47-AFD9-FC72A5BC0F3E}" type="slidenum">
+            <a:fld id="{33B7E328-6BDA-45FF-9208-B5C6DDD5E73B}" type="slidenum">
               <a:rPr lang="en-US" sz="1000" b="0" u="none" strike="noStrike">
                 <a:solidFill>
                   <a:schemeClr val="dk2"/>
@@ -2928,7 +2928,7 @@
                 <a:uFillTx/>
                 <a:latin typeface="Calibri"/>
               </a:rPr>
-              <a:t>&lt;number&gt;</a:t>
+              <a:t>9</a:t>
             </a:fld>
             <a:endParaRPr lang="en-US" sz="1000" b="0" u="none" strike="noStrike">
               <a:solidFill>
@@ -6662,7 +6662,7 @@
               </a:lnSpc>
               <a:buNone/>
             </a:pPr>
-            <a:fld id="{612FA875-F772-4756-8C8C-3B467E1F3FEA}" type="slidenum">
+            <a:fld id="{80161654-3EB6-4886-946B-DD30E7CCCA09}" type="slidenum">
               <a:rPr lang="en-US" sz="1000" b="0" u="none" strike="noStrike">
                 <a:solidFill>
                   <a:schemeClr val="dk2"/>
@@ -6671,7 +6671,7 @@
                 <a:uFillTx/>
                 <a:latin typeface="Calibri"/>
               </a:rPr>
-              <a:t>&lt;number&gt;</a:t>
+              <a:t>9</a:t>
             </a:fld>
             <a:endParaRPr lang="en-US" sz="1000" b="0" u="none" strike="noStrike">
               <a:solidFill>
@@ -7222,7 +7222,7 @@
               </a:lnSpc>
               <a:buNone/>
             </a:pPr>
-            <a:fld id="{9CADA9EA-528E-4309-BEEF-C68558F0F4B8}" type="slidenum">
+            <a:fld id="{28A19848-81F5-4A9A-B1BF-23791F369E4E}" type="slidenum">
               <a:rPr lang="en-US" sz="1000" b="0" u="none" strike="noStrike">
                 <a:solidFill>
                   <a:schemeClr val="dk2"/>
@@ -7231,7 +7231,7 @@
                 <a:uFillTx/>
                 <a:latin typeface="Calibri"/>
               </a:rPr>
-              <a:t>&lt;number&gt;</a:t>
+              <a:t>9</a:t>
             </a:fld>
             <a:endParaRPr lang="en-US" sz="1000" b="0" u="none" strike="noStrike">
               <a:solidFill>
@@ -7597,7 +7597,7 @@
               </a:lnSpc>
               <a:buNone/>
             </a:pPr>
-            <a:fld id="{90CBB6EF-24D7-4A88-8707-7C84CE178EEC}" type="slidenum">
+            <a:fld id="{EF2E9719-526E-49B0-95F1-C0EF6AFDB6C7}" type="slidenum">
               <a:rPr lang="en-US" sz="1000" b="0" u="none" strike="noStrike">
                 <a:solidFill>
                   <a:schemeClr val="dk2"/>
@@ -7606,7 +7606,7 @@
                 <a:uFillTx/>
                 <a:latin typeface="Calibri"/>
               </a:rPr>
-              <a:t>&lt;number&gt;</a:t>
+              <a:t>9</a:t>
             </a:fld>
             <a:endParaRPr lang="en-US" sz="1000" b="0" u="none" strike="noStrike">
               <a:solidFill>
@@ -7695,7 +7695,7 @@
                 <a:uFillTx/>
                 <a:latin typeface="Calibri"/>
               </a:rPr>
-              <a:t>Model Improvements</a:t>
+              <a:t>LLM Improvements</a:t>
             </a:r>
             <a:endParaRPr lang="en-US" sz="3200" b="0" u="none" strike="noStrike">
               <a:solidFill>
@@ -7983,7 +7983,7 @@
                 <a:uFillTx/>
                 <a:latin typeface="Calibri"/>
               </a:rPr>
-              <a:t>Navier-Stokes; unit distance; Erdos problems</a:t>
+              <a:t>Navier-Stokes; Erdos problems</a:t>
             </a:r>
             <a:endParaRPr lang="en-US" sz="2000" b="0" u="none" strike="noStrike">
               <a:solidFill>
@@ -8046,7 +8046,7 @@
               </a:lnSpc>
               <a:buNone/>
             </a:pPr>
-            <a:fld id="{BD9623EE-ACBB-4010-AE50-B5D53DAC4B14}" type="slidenum">
+            <a:fld id="{515FE3B5-6A4A-4B2E-831D-3BB0BC1CCE5B}" type="slidenum">
               <a:rPr lang="en-US" sz="1000" b="0" u="none" strike="noStrike">
                 <a:solidFill>
                   <a:schemeClr val="dk2"/>
@@ -8055,7 +8055,7 @@
                 <a:uFillTx/>
                 <a:latin typeface="Calibri"/>
               </a:rPr>
-              <a:t>&lt;number&gt;</a:t>
+              <a:t>9</a:t>
             </a:fld>
             <a:endParaRPr lang="en-US" sz="1000" b="0" u="none" strike="noStrike">
               <a:solidFill>
@@ -8395,7 +8395,7 @@
                 <a:uFillTx/>
                 <a:latin typeface="Calibri"/>
               </a:rPr>
-              <a:t>Used as personal “admin”, coder, purchasing agent</a:t>
+              <a:t>Used as personal “admin”, coder</a:t>
             </a:r>
             <a:endParaRPr lang="en-US" sz="2200" b="0" u="none" strike="noStrike">
               <a:solidFill>
@@ -8495,7 +8495,7 @@
               </a:lnSpc>
               <a:buNone/>
             </a:pPr>
-            <a:fld id="{962D4D04-B218-4579-8BDB-C6B6795BCF8D}" type="slidenum">
+            <a:fld id="{EF8DB6A0-4069-4BA5-9CCD-79F24675AB41}" type="slidenum">
               <a:rPr lang="en-US" sz="1000" b="0" u="none" strike="noStrike">
                 <a:solidFill>
                   <a:schemeClr val="dk2"/>
@@ -8504,7 +8504,7 @@
                 <a:uFillTx/>
                 <a:latin typeface="Calibri"/>
               </a:rPr>
-              <a:t>&lt;number&gt;</a:t>
+              <a:t>9</a:t>
             </a:fld>
             <a:endParaRPr lang="en-US" sz="1000" b="0" u="none" strike="noStrike">
               <a:solidFill>
@@ -8981,7 +8981,7 @@
               </a:lnSpc>
               <a:buNone/>
             </a:pPr>
-            <a:fld id="{26FFD62F-9C03-401D-AE4F-E1833AE38DD8}" type="slidenum">
+            <a:fld id="{7963F027-851D-40D5-AC54-860B381F6792}" type="slidenum">
               <a:rPr lang="en-US" sz="1000" b="0" u="none" strike="noStrike">
                 <a:solidFill>
                   <a:schemeClr val="dk2"/>
@@ -8990,7 +8990,7 @@
                 <a:uFillTx/>
                 <a:latin typeface="Calibri"/>
               </a:rPr>
-              <a:t>&lt;number&gt;</a:t>
+              <a:t>9</a:t>
             </a:fld>
             <a:endParaRPr lang="en-US" sz="1000" b="0" u="none" strike="noStrike">
               <a:solidFill>
@@ -9467,7 +9467,7 @@
               </a:lnSpc>
               <a:buNone/>
             </a:pPr>
-            <a:fld id="{8C696B58-3B6E-41E9-853C-226BB8BB9925}" type="slidenum">
+            <a:fld id="{C1AB46C7-B061-45C0-8B40-30B79B97B80C}" type="slidenum">
               <a:rPr lang="en-US" sz="1000" b="0" u="none" strike="noStrike">
                 <a:solidFill>
                   <a:schemeClr val="dk2"/>
@@ -9476,7 +9476,7 @@
                 <a:uFillTx/>
                 <a:latin typeface="Calibri"/>
               </a:rPr>
-              <a:t>&lt;number&gt;</a:t>
+              <a:t>9</a:t>
             </a:fld>
             <a:endParaRPr lang="en-US" sz="1000" b="0" u="none" strike="noStrike">
               <a:solidFill>
@@ -9916,7 +9916,7 @@
               </a:lnSpc>
               <a:buNone/>
             </a:pPr>
-            <a:fld id="{ED9F2687-E74F-4171-A13F-EC52C7CB806E}" type="slidenum">
+            <a:fld id="{BD3880EB-0362-4629-9F2B-4F808B7C2CA6}" type="slidenum">
               <a:rPr lang="en-US" sz="1000" b="0" u="none" strike="noStrike">
                 <a:solidFill>
                   <a:schemeClr val="dk2"/>
@@ -9925,7 +9925,7 @@
                 <a:uFillTx/>
                 <a:latin typeface="Calibri"/>
               </a:rPr>
-              <a:t>&lt;number&gt;</a:t>
+              <a:t>9</a:t>
             </a:fld>
             <a:endParaRPr lang="en-US" sz="1000" b="0" u="none" strike="noStrike">
               <a:solidFill>
@@ -10439,7 +10439,7 @@
               </a:lnSpc>
               <a:buNone/>
             </a:pPr>
-            <a:fld id="{0435D70B-1EC3-4B09-A7F7-18483CACA5C5}" type="slidenum">
+            <a:fld id="{8330F923-8316-4D63-BFDF-46319063C556}" type="slidenum">
               <a:rPr lang="en-US" sz="1000" b="0" u="none" strike="noStrike">
                 <a:solidFill>
                   <a:schemeClr val="dk2"/>
@@ -10448,7 +10448,7 @@
                 <a:uFillTx/>
                 <a:latin typeface="Calibri"/>
               </a:rPr>
-              <a:t>&lt;number&gt;</a:t>
+              <a:t>9</a:t>
             </a:fld>
             <a:endParaRPr lang="en-US" sz="1000" b="0" u="none" strike="noStrike">
               <a:solidFill>
@@ -10595,7 +10595,7 @@
               <a:buChar char="•"/>
             </a:pPr>
             <a:r>
-              <a:rPr lang="en-US" sz="1800" b="0" u="none" strike="noStrike">
+              <a:rPr lang="en-US" sz="2000" b="0" u="none" strike="noStrike">
                 <a:solidFill>
                   <a:schemeClr val="dk1"/>
                 </a:solidFill>
@@ -10605,7 +10605,7 @@
               </a:rPr>
               <a:t>Focus on breadth of learning, judgment, design, and effective use of AI</a:t>
             </a:r>
-            <a:endParaRPr lang="en-US" sz="1800" b="0" u="none" strike="noStrike">
+            <a:endParaRPr lang="en-US" sz="2000" b="0" u="none" strike="noStrike">
               <a:solidFill>
                 <a:schemeClr val="dk1"/>
               </a:solidFill>
@@ -10632,7 +10632,7 @@
               <a:buChar char="–"/>
             </a:pPr>
             <a:r>
-              <a:rPr lang="en-US" sz="1600" b="0" u="none" strike="noStrike">
+              <a:rPr lang="en-US" sz="2000" b="0" u="none" strike="noStrike">
                 <a:solidFill>
                   <a:schemeClr val="dk1"/>
                 </a:solidFill>
@@ -10642,7 +10642,7 @@
               </a:rPr>
               <a:t>Physical fitness still matters even with powerful physical machines</a:t>
             </a:r>
-            <a:endParaRPr lang="en-US" sz="1600" b="0" u="none" strike="noStrike">
+            <a:endParaRPr lang="en-US" sz="2000" b="0" u="none" strike="noStrike">
               <a:solidFill>
                 <a:schemeClr val="dk1"/>
               </a:solidFill>
@@ -10669,7 +10669,7 @@
               <a:buChar char="–"/>
             </a:pPr>
             <a:r>
-              <a:rPr lang="en-US" sz="1600" b="0" u="none" strike="noStrike">
+              <a:rPr lang="en-US" sz="2000" b="0" u="none" strike="noStrike">
                 <a:solidFill>
                   <a:schemeClr val="dk1"/>
                 </a:solidFill>
@@ -10679,7 +10679,7 @@
               </a:rPr>
               <a:t>Mental fitness still matters even with powerful mental machines</a:t>
             </a:r>
-            <a:endParaRPr lang="en-US" sz="1600" b="0" u="none" strike="noStrike">
+            <a:endParaRPr lang="en-US" sz="2000" b="0" u="none" strike="noStrike">
               <a:solidFill>
                 <a:schemeClr val="dk1"/>
               </a:solidFill>
@@ -10706,17 +10706,17 @@
               <a:buChar char="–"/>
             </a:pPr>
             <a:r>
-              <a:rPr lang="en-US" sz="1600" b="0" u="none" strike="noStrike">
-                <a:solidFill>
-                  <a:schemeClr val="dk1"/>
-                </a:solidFill>
-                <a:effectLst/>
-                <a:uFillTx/>
-                <a:latin typeface="Calibri"/>
-              </a:rPr>
-              <a:t>Step over the “apprentice gap”; </a:t>
-            </a:r>
-            <a:endParaRPr lang="en-US" sz="1600" b="0" u="none" strike="noStrike">
+              <a:rPr lang="en-US" sz="2000" b="0" u="none" strike="noStrike">
+                <a:solidFill>
+                  <a:schemeClr val="dk1"/>
+                </a:solidFill>
+                <a:effectLst/>
+                <a:uFillTx/>
+                <a:latin typeface="Calibri"/>
+              </a:rPr>
+              <a:t>AI enhances capability, it does not replace it</a:t>
+            </a:r>
+            <a:endParaRPr lang="en-US" sz="2000" b="0" u="none" strike="noStrike">
               <a:solidFill>
                 <a:schemeClr val="dk1"/>
               </a:solidFill>
@@ -10743,17 +10743,17 @@
               <a:buChar char="–"/>
             </a:pPr>
             <a:r>
-              <a:rPr lang="en-US" sz="1600" b="0" u="none" strike="noStrike">
-                <a:solidFill>
-                  <a:schemeClr val="dk1"/>
-                </a:solidFill>
-                <a:effectLst/>
-                <a:uFillTx/>
-                <a:latin typeface="Calibri"/>
-              </a:rPr>
-              <a:t>AI enhances capability, it does not replace it</a:t>
-            </a:r>
-            <a:endParaRPr lang="en-US" sz="1600" b="0" u="none" strike="noStrike">
+              <a:rPr lang="en-US" sz="2000" b="0" u="none" strike="noStrike">
+                <a:solidFill>
+                  <a:schemeClr val="dk1"/>
+                </a:solidFill>
+                <a:effectLst/>
+                <a:uFillTx/>
+                <a:latin typeface="Calibri"/>
+              </a:rPr>
+              <a:t>Step over the “apprentice gap”</a:t>
+            </a:r>
+            <a:endParaRPr lang="en-US" sz="2000" b="0" u="none" strike="noStrike">
               <a:solidFill>
                 <a:schemeClr val="dk1"/>
               </a:solidFill>
@@ -10780,7 +10780,7 @@
               <a:buChar char="•"/>
             </a:pPr>
             <a:r>
-              <a:rPr lang="en-US" sz="1800" b="0" u="none" strike="noStrike">
+              <a:rPr lang="en-US" sz="2000" b="0" u="none" strike="noStrike">
                 <a:solidFill>
                   <a:schemeClr val="dk1"/>
                 </a:solidFill>
@@ -10790,7 +10790,7 @@
               </a:rPr>
               <a:t>Specifics:</a:t>
             </a:r>
-            <a:endParaRPr lang="en-US" sz="1800" b="0" u="none" strike="noStrike">
+            <a:endParaRPr lang="en-US" sz="2000" b="0" u="none" strike="noStrike">
               <a:solidFill>
                 <a:schemeClr val="dk1"/>
               </a:solidFill>
@@ -10817,7 +10817,7 @@
               <a:buChar char="–"/>
             </a:pPr>
             <a:r>
-              <a:rPr lang="en-US" sz="1600" b="0" u="none" strike="noStrike">
+              <a:rPr lang="en-US" sz="2000" b="0" u="none" strike="noStrike">
                 <a:solidFill>
                   <a:schemeClr val="dk1"/>
                 </a:solidFill>
@@ -10827,7 +10827,7 @@
               </a:rPr>
               <a:t>Emphasis on no-transistors testing and evaluations</a:t>
             </a:r>
-            <a:endParaRPr lang="en-US" sz="1600" b="0" u="none" strike="noStrike">
+            <a:endParaRPr lang="en-US" sz="2000" b="0" u="none" strike="noStrike">
               <a:solidFill>
                 <a:schemeClr val="dk1"/>
               </a:solidFill>
@@ -10854,7 +10854,7 @@
               <a:buChar char="–"/>
             </a:pPr>
             <a:r>
-              <a:rPr lang="en-US" sz="1600" b="0" u="none" strike="noStrike">
+              <a:rPr lang="en-US" sz="2000" b="0" u="none" strike="noStrike">
                 <a:solidFill>
                   <a:schemeClr val="dk1"/>
                 </a:solidFill>
@@ -10864,7 +10864,7 @@
               </a:rPr>
               <a:t>Clear standards on use and non-use of AI</a:t>
             </a:r>
-            <a:endParaRPr lang="en-US" sz="1600" b="0" u="none" strike="noStrike">
+            <a:endParaRPr lang="en-US" sz="2000" b="0" u="none" strike="noStrike">
               <a:solidFill>
                 <a:schemeClr val="dk1"/>
               </a:solidFill>
@@ -10891,91 +10891,17 @@
               <a:buChar char="–"/>
             </a:pPr>
             <a:r>
-              <a:rPr lang="en-US" sz="1600" b="0" u="none" strike="noStrike">
-                <a:solidFill>
-                  <a:schemeClr val="dk1"/>
-                </a:solidFill>
-                <a:effectLst/>
-                <a:uFillTx/>
-                <a:latin typeface="Calibri"/>
-              </a:rPr>
-              <a:t>Teaching constructive use of AI, e.g.</a:t>
-            </a:r>
-            <a:endParaRPr lang="en-US" sz="1600" b="0" u="none" strike="noStrike">
-              <a:solidFill>
-                <a:schemeClr val="dk1"/>
-              </a:solidFill>
-              <a:effectLst/>
-              <a:uFillTx/>
-              <a:latin typeface="Calibri"/>
-            </a:endParaRPr>
-          </a:p>
-          <a:p>
-            <a:pPr marL="685800" lvl="2" indent="-228600" defTabSz="914400">
-              <a:lnSpc>
-                <a:spcPct val="100000"/>
-              </a:lnSpc>
-              <a:spcBef>
-                <a:spcPts val="281"/>
-              </a:spcBef>
-              <a:spcAft>
-                <a:spcPts val="400"/>
-              </a:spcAft>
-              <a:buClr>
-                <a:srgbClr val="1a2238"/>
-              </a:buClr>
-              <a:buFont typeface="Arial"/>
-              <a:buChar char="–"/>
-            </a:pPr>
-            <a:r>
-              <a:rPr lang="en-US" sz="1400" b="0" u="none" strike="noStrike">
-                <a:solidFill>
-                  <a:schemeClr val="dk1"/>
-                </a:solidFill>
-                <a:effectLst/>
-                <a:uFillTx/>
-                <a:latin typeface="Calibri"/>
-              </a:rPr>
-              <a:t>As tutor or enhanced “textbook”</a:t>
-            </a:r>
-            <a:endParaRPr lang="en-US" sz="1400" b="0" u="none" strike="noStrike">
-              <a:solidFill>
-                <a:schemeClr val="dk1"/>
-              </a:solidFill>
-              <a:effectLst/>
-              <a:uFillTx/>
-              <a:latin typeface="Calibri"/>
-            </a:endParaRPr>
-          </a:p>
-          <a:p>
-            <a:pPr marL="685800" lvl="2" indent="-228600" defTabSz="914400">
-              <a:lnSpc>
-                <a:spcPct val="100000"/>
-              </a:lnSpc>
-              <a:spcBef>
-                <a:spcPts val="281"/>
-              </a:spcBef>
-              <a:spcAft>
-                <a:spcPts val="400"/>
-              </a:spcAft>
-              <a:buClr>
-                <a:srgbClr val="1a2238"/>
-              </a:buClr>
-              <a:buFont typeface="Arial"/>
-              <a:buChar char="–"/>
-            </a:pPr>
-            <a:r>
-              <a:rPr lang="en-US" sz="1400" b="0" u="none" strike="noStrike">
-                <a:solidFill>
-                  <a:schemeClr val="dk1"/>
-                </a:solidFill>
-                <a:effectLst/>
-                <a:uFillTx/>
-                <a:latin typeface="Calibri"/>
-              </a:rPr>
-              <a:t>For individual self-study in jr/sr years</a:t>
-            </a:r>
-            <a:endParaRPr lang="en-US" sz="1400" b="0" u="none" strike="noStrike">
+              <a:rPr lang="en-US" sz="2000" b="0" u="none" strike="noStrike">
+                <a:solidFill>
+                  <a:schemeClr val="dk1"/>
+                </a:solidFill>
+                <a:effectLst/>
+                <a:uFillTx/>
+                <a:latin typeface="Calibri"/>
+              </a:rPr>
+              <a:t>Teaching constructive use of AI</a:t>
+            </a:r>
+            <a:endParaRPr lang="en-US" sz="2000" b="0" u="none" strike="noStrike">
               <a:solidFill>
                 <a:schemeClr val="dk1"/>
               </a:solidFill>
@@ -11036,7 +10962,7 @@
               </a:lnSpc>
               <a:buNone/>
             </a:pPr>
-            <a:fld id="{087B6B5D-21CC-49FC-800B-CB01CBFF2A8D}" type="slidenum">
+            <a:fld id="{06531693-4429-401B-935F-1446E0320725}" type="slidenum">
               <a:rPr lang="en-US" sz="1000" b="0" u="none" strike="noStrike">
                 <a:solidFill>
                   <a:schemeClr val="dk2"/>
@@ -11045,7 +10971,7 @@
                 <a:uFillTx/>
                 <a:latin typeface="Calibri"/>
               </a:rPr>
-              <a:t>&lt;number&gt;</a:t>
+              <a:t>9</a:t>
             </a:fld>
             <a:endParaRPr lang="en-US" sz="1000" b="0" u="none" strike="noStrike">
               <a:solidFill>
